--- a/Training Materials/17. Understanding Microservices/Slides/4. Design Patterns of Microservices/design-patterns-of-microservices-slides.pptx
+++ b/Training Materials/17. Understanding Microservices/Slides/4. Design Patterns of Microservices/design-patterns-of-microservices-slides.pptx
@@ -5,7 +5,7 @@
     <p:sldMasterId id="2147483648" r:id="rId1"/>
   </p:sldMasterIdLst>
   <p:notesMasterIdLst>
-    <p:notesMasterId r:id="rId16"/>
+    <p:notesMasterId r:id="rId31"/>
   </p:notesMasterIdLst>
   <p:sldIdLst>
     <p:sldId id="257" r:id="rId3"/>
@@ -21,6 +21,21 @@
     <p:sldId id="266" r:id="rId13"/>
     <p:sldId id="267" r:id="rId14"/>
     <p:sldId id="268" r:id="rId15"/>
+    <p:sldId id="270" r:id="rId16"/>
+    <p:sldId id="269" r:id="rId17"/>
+    <p:sldId id="271" r:id="rId18"/>
+    <p:sldId id="272" r:id="rId19"/>
+    <p:sldId id="273" r:id="rId20"/>
+    <p:sldId id="275" r:id="rId21"/>
+    <p:sldId id="274" r:id="rId22"/>
+    <p:sldId id="276" r:id="rId23"/>
+    <p:sldId id="277" r:id="rId24"/>
+    <p:sldId id="278" r:id="rId25"/>
+    <p:sldId id="279" r:id="rId26"/>
+    <p:sldId id="280" r:id="rId27"/>
+    <p:sldId id="281" r:id="rId28"/>
+    <p:sldId id="282" r:id="rId29"/>
+    <p:sldId id="283" r:id="rId30"/>
   </p:sldIdLst>
   <p:sldSz cx="12192000" cy="6858000"/>
   <p:notesSz cx="6858000" cy="9144000"/>
@@ -3822,6 +3837,585 @@
 </p:sld>
 </file>
 
+<file path=ppt/slides/slide14.xml><?xml version="1.0" encoding="utf-8"?>
+<p:sld xmlns:a="http://schemas.openxmlformats.org/drawingml/2006/main" xmlns:r="http://schemas.openxmlformats.org/officeDocument/2006/relationships" xmlns:p="http://schemas.openxmlformats.org/presentationml/2006/main">
+  <p:cSld>
+    <p:spTree>
+      <p:nvGrpSpPr>
+        <p:cNvPr id="1" name=""/>
+        <p:cNvGrpSpPr/>
+        <p:nvPr/>
+      </p:nvGrpSpPr>
+      <p:grpSpPr/>
+      <p:sp>
+        <p:nvSpPr>
+          <p:cNvPr id="3" name="Content Placeholder 2"/>
+          <p:cNvSpPr>
+            <a:spLocks noGrp="1"/>
+          </p:cNvSpPr>
+          <p:nvPr>
+            <p:ph idx="1"/>
+          </p:nvPr>
+        </p:nvSpPr>
+        <p:spPr/>
+        <p:txBody>
+          <a:bodyPr/>
+          <a:p>
+            <a:endParaRPr lang="en-US"/>
+          </a:p>
+        </p:txBody>
+      </p:sp>
+      <p:sp>
+        <p:nvSpPr>
+          <p:cNvPr id="4" name="Slide Number Placeholder 3"/>
+          <p:cNvSpPr>
+            <a:spLocks noGrp="1"/>
+          </p:cNvSpPr>
+          <p:nvPr>
+            <p:ph type="sldNum" sz="quarter" idx="12"/>
+          </p:nvPr>
+        </p:nvSpPr>
+        <p:spPr/>
+        <p:txBody>
+          <a:bodyPr/>
+          <a:p>
+            <a:fld id="{9B618960-8005-486C-9A75-10CB2AAC16F9}" type="slidenum">
+              <a:rPr lang="en-US" smtClean="0"/>
+            </a:fld>
+            <a:endParaRPr lang="en-US"/>
+          </a:p>
+        </p:txBody>
+      </p:sp>
+      <p:sp>
+        <p:nvSpPr>
+          <p:cNvPr id="5" name="Title 1"/>
+          <p:cNvSpPr>
+            <a:spLocks noGrp="1"/>
+          </p:cNvSpPr>
+          <p:nvPr/>
+        </p:nvSpPr>
+        <p:spPr>
+          <a:xfrm>
+            <a:off x="965200" y="0"/>
+            <a:ext cx="10515600" cy="1325563"/>
+          </a:xfrm>
+          <a:prstGeom prst="rect">
+            <a:avLst/>
+          </a:prstGeom>
+        </p:spPr>
+        <p:txBody>
+          <a:bodyPr vert="horz" lIns="91440" tIns="45720" rIns="91440" bIns="45720" rtlCol="0" anchor="ctr">
+            <a:normAutofit/>
+          </a:bodyPr>
+          <a:lstStyle>
+            <a:lvl1pPr algn="l" defTabSz="914400" rtl="0" eaLnBrk="1" latinLnBrk="0" hangingPunct="1">
+              <a:lnSpc>
+                <a:spcPct val="90000"/>
+              </a:lnSpc>
+              <a:spcBef>
+                <a:spcPct val="0"/>
+              </a:spcBef>
+              <a:buNone/>
+              <a:defRPr sz="4400" kern="1200">
+                <a:solidFill>
+                  <a:schemeClr val="tx1"/>
+                </a:solidFill>
+                <a:latin typeface="+mj-lt"/>
+                <a:ea typeface="+mj-ea"/>
+                <a:cs typeface="+mj-cs"/>
+              </a:defRPr>
+            </a:lvl1pPr>
+          </a:lstStyle>
+          <a:p>
+            <a:pPr algn="ctr">
+              <a:buClrTx/>
+              <a:buSzTx/>
+              <a:buFontTx/>
+            </a:pPr>
+            <a:r>
+              <a:rPr lang="en-US" dirty="0"/>
+              <a:t>Bulkhead Pattern</a:t>
+            </a:r>
+            <a:endParaRPr lang="en-US" dirty="0"/>
+          </a:p>
+        </p:txBody>
+      </p:sp>
+      <p:pic>
+        <p:nvPicPr>
+          <p:cNvPr id="6" name="Picture 5"/>
+          <p:cNvPicPr/>
+          <p:nvPr/>
+        </p:nvPicPr>
+        <p:blipFill>
+          <a:blip r:embed="rId1"/>
+          <a:stretch>
+            <a:fillRect/>
+          </a:stretch>
+        </p:blipFill>
+        <p:spPr>
+          <a:xfrm>
+            <a:off x="2611755" y="1181735"/>
+            <a:ext cx="7907020" cy="5454650"/>
+          </a:xfrm>
+          <a:prstGeom prst="rect">
+            <a:avLst/>
+          </a:prstGeom>
+        </p:spPr>
+      </p:pic>
+    </p:spTree>
+  </p:cSld>
+  <p:clrMapOvr>
+    <a:masterClrMapping/>
+  </p:clrMapOvr>
+</p:sld>
+</file>
+
+<file path=ppt/slides/slide15.xml><?xml version="1.0" encoding="utf-8"?>
+<p:sld xmlns:a="http://schemas.openxmlformats.org/drawingml/2006/main" xmlns:r="http://schemas.openxmlformats.org/officeDocument/2006/relationships" xmlns:p="http://schemas.openxmlformats.org/presentationml/2006/main">
+  <p:cSld>
+    <p:spTree>
+      <p:nvGrpSpPr>
+        <p:cNvPr id="1" name=""/>
+        <p:cNvGrpSpPr/>
+        <p:nvPr/>
+      </p:nvGrpSpPr>
+      <p:grpSpPr/>
+      <p:sp>
+        <p:nvSpPr>
+          <p:cNvPr id="2" name="Title 1"/>
+          <p:cNvSpPr>
+            <a:spLocks noGrp="1"/>
+          </p:cNvSpPr>
+          <p:nvPr>
+            <p:ph type="title"/>
+          </p:nvPr>
+        </p:nvSpPr>
+        <p:spPr/>
+        <p:txBody>
+          <a:bodyPr/>
+          <a:p>
+            <a:pPr algn="ctr">
+              <a:buClrTx/>
+              <a:buSzTx/>
+              <a:buFontTx/>
+            </a:pPr>
+            <a:r>
+              <a:rPr lang="en-US" dirty="0"/>
+              <a:t>Bulkhead Pattern</a:t>
+            </a:r>
+            <a:endParaRPr lang="en-US" dirty="0"/>
+          </a:p>
+        </p:txBody>
+      </p:sp>
+      <p:sp>
+        <p:nvSpPr>
+          <p:cNvPr id="4" name="Slide Number Placeholder 3"/>
+          <p:cNvSpPr>
+            <a:spLocks noGrp="1"/>
+          </p:cNvSpPr>
+          <p:nvPr>
+            <p:ph type="sldNum" sz="quarter" idx="12"/>
+          </p:nvPr>
+        </p:nvSpPr>
+        <p:spPr/>
+        <p:txBody>
+          <a:bodyPr/>
+          <a:p>
+            <a:fld id="{9B618960-8005-486C-9A75-10CB2AAC16F9}" type="slidenum">
+              <a:rPr lang="en-US" smtClean="0"/>
+            </a:fld>
+            <a:endParaRPr lang="en-US"/>
+          </a:p>
+        </p:txBody>
+      </p:sp>
+      <p:pic>
+        <p:nvPicPr>
+          <p:cNvPr id="5" name="Picture 4" descr="0_H-G0yevquR_gVsjp"/>
+          <p:cNvPicPr>
+            <a:picLocks noChangeAspect="1"/>
+          </p:cNvPicPr>
+          <p:nvPr/>
+        </p:nvPicPr>
+        <p:blipFill>
+          <a:blip r:embed="rId1"/>
+          <a:stretch>
+            <a:fillRect/>
+          </a:stretch>
+        </p:blipFill>
+        <p:spPr>
+          <a:xfrm>
+            <a:off x="2136775" y="1520825"/>
+            <a:ext cx="8195945" cy="5200650"/>
+          </a:xfrm>
+          <a:prstGeom prst="rect">
+            <a:avLst/>
+          </a:prstGeom>
+        </p:spPr>
+      </p:pic>
+    </p:spTree>
+  </p:cSld>
+  <p:clrMapOvr>
+    <a:masterClrMapping/>
+  </p:clrMapOvr>
+</p:sld>
+</file>
+
+<file path=ppt/slides/slide16.xml><?xml version="1.0" encoding="utf-8"?>
+<p:sld xmlns:a="http://schemas.openxmlformats.org/drawingml/2006/main" xmlns:r="http://schemas.openxmlformats.org/officeDocument/2006/relationships" xmlns:p="http://schemas.openxmlformats.org/presentationml/2006/main">
+  <p:cSld>
+    <p:spTree>
+      <p:nvGrpSpPr>
+        <p:cNvPr id="1" name=""/>
+        <p:cNvGrpSpPr/>
+        <p:nvPr/>
+      </p:nvGrpSpPr>
+      <p:grpSpPr/>
+      <p:sp>
+        <p:nvSpPr>
+          <p:cNvPr id="2" name="Title 1"/>
+          <p:cNvSpPr>
+            <a:spLocks noGrp="1"/>
+          </p:cNvSpPr>
+          <p:nvPr>
+            <p:ph type="title"/>
+          </p:nvPr>
+        </p:nvSpPr>
+        <p:spPr/>
+        <p:txBody>
+          <a:bodyPr/>
+          <a:p>
+            <a:pPr algn="ctr">
+              <a:buClrTx/>
+              <a:buSzTx/>
+              <a:buFontTx/>
+            </a:pPr>
+            <a:r>
+              <a:rPr lang="en-US" dirty="0"/>
+              <a:t>Bulkhead Pattern</a:t>
+            </a:r>
+            <a:endParaRPr lang="en-US" dirty="0"/>
+          </a:p>
+        </p:txBody>
+      </p:sp>
+      <p:sp>
+        <p:nvSpPr>
+          <p:cNvPr id="4" name="Slide Number Placeholder 3"/>
+          <p:cNvSpPr>
+            <a:spLocks noGrp="1"/>
+          </p:cNvSpPr>
+          <p:nvPr>
+            <p:ph type="sldNum" sz="quarter" idx="12"/>
+          </p:nvPr>
+        </p:nvSpPr>
+        <p:spPr/>
+        <p:txBody>
+          <a:bodyPr/>
+          <a:p>
+            <a:fld id="{9B618960-8005-486C-9A75-10CB2AAC16F9}" type="slidenum">
+              <a:rPr lang="en-US" smtClean="0"/>
+            </a:fld>
+            <a:endParaRPr lang="en-US"/>
+          </a:p>
+        </p:txBody>
+      </p:sp>
+      <p:pic>
+        <p:nvPicPr>
+          <p:cNvPr id="3" name="Picture 2" descr="0_HF6-ctxg7rIz_Imw"/>
+          <p:cNvPicPr>
+            <a:picLocks noChangeAspect="1"/>
+          </p:cNvPicPr>
+          <p:nvPr/>
+        </p:nvPicPr>
+        <p:blipFill>
+          <a:blip r:embed="rId1"/>
+          <a:stretch>
+            <a:fillRect/>
+          </a:stretch>
+        </p:blipFill>
+        <p:spPr>
+          <a:xfrm>
+            <a:off x="3009900" y="714375"/>
+            <a:ext cx="6172200" cy="5429250"/>
+          </a:xfrm>
+          <a:prstGeom prst="rect">
+            <a:avLst/>
+          </a:prstGeom>
+        </p:spPr>
+      </p:pic>
+    </p:spTree>
+  </p:cSld>
+  <p:clrMapOvr>
+    <a:masterClrMapping/>
+  </p:clrMapOvr>
+</p:sld>
+</file>
+
+<file path=ppt/slides/slide17.xml><?xml version="1.0" encoding="utf-8"?>
+<p:sld xmlns:a="http://schemas.openxmlformats.org/drawingml/2006/main" xmlns:r="http://schemas.openxmlformats.org/officeDocument/2006/relationships" xmlns:p="http://schemas.openxmlformats.org/presentationml/2006/main">
+  <p:cSld>
+    <p:spTree>
+      <p:nvGrpSpPr>
+        <p:cNvPr id="1" name=""/>
+        <p:cNvGrpSpPr/>
+        <p:nvPr/>
+      </p:nvGrpSpPr>
+      <p:grpSpPr/>
+      <p:sp>
+        <p:nvSpPr>
+          <p:cNvPr id="2" name="Title 1"/>
+          <p:cNvSpPr>
+            <a:spLocks noGrp="1"/>
+          </p:cNvSpPr>
+          <p:nvPr>
+            <p:ph type="title"/>
+          </p:nvPr>
+        </p:nvSpPr>
+        <p:spPr/>
+        <p:txBody>
+          <a:bodyPr/>
+          <a:p>
+            <a:pPr algn="ctr">
+              <a:buClrTx/>
+              <a:buSzTx/>
+              <a:buFontTx/>
+            </a:pPr>
+            <a:r>
+              <a:rPr lang="en-US" dirty="0"/>
+              <a:t>Sidecar Pattern</a:t>
+            </a:r>
+            <a:endParaRPr lang="en-US" dirty="0"/>
+          </a:p>
+        </p:txBody>
+      </p:sp>
+      <p:sp>
+        <p:nvSpPr>
+          <p:cNvPr id="4" name="Slide Number Placeholder 3"/>
+          <p:cNvSpPr>
+            <a:spLocks noGrp="1"/>
+          </p:cNvSpPr>
+          <p:nvPr>
+            <p:ph type="sldNum" sz="quarter" idx="12"/>
+          </p:nvPr>
+        </p:nvSpPr>
+        <p:spPr/>
+        <p:txBody>
+          <a:bodyPr/>
+          <a:p>
+            <a:fld id="{9B618960-8005-486C-9A75-10CB2AAC16F9}" type="slidenum">
+              <a:rPr lang="en-US" smtClean="0"/>
+            </a:fld>
+            <a:endParaRPr lang="en-US"/>
+          </a:p>
+        </p:txBody>
+      </p:sp>
+      <p:pic>
+        <p:nvPicPr>
+          <p:cNvPr id="5" name="Picture 4"/>
+          <p:cNvPicPr>
+            <a:picLocks noChangeAspect="1"/>
+          </p:cNvPicPr>
+          <p:nvPr/>
+        </p:nvPicPr>
+        <p:blipFill>
+          <a:blip r:embed="rId1"/>
+          <a:stretch>
+            <a:fillRect/>
+          </a:stretch>
+        </p:blipFill>
+        <p:spPr>
+          <a:xfrm>
+            <a:off x="1861820" y="1691005"/>
+            <a:ext cx="8777605" cy="4495800"/>
+          </a:xfrm>
+          <a:prstGeom prst="rect">
+            <a:avLst/>
+          </a:prstGeom>
+        </p:spPr>
+      </p:pic>
+    </p:spTree>
+  </p:cSld>
+  <p:clrMapOvr>
+    <a:masterClrMapping/>
+  </p:clrMapOvr>
+</p:sld>
+</file>
+
+<file path=ppt/slides/slide18.xml><?xml version="1.0" encoding="utf-8"?>
+<p:sld xmlns:a="http://schemas.openxmlformats.org/drawingml/2006/main" xmlns:r="http://schemas.openxmlformats.org/officeDocument/2006/relationships" xmlns:p="http://schemas.openxmlformats.org/presentationml/2006/main">
+  <p:cSld>
+    <p:spTree>
+      <p:nvGrpSpPr>
+        <p:cNvPr id="1" name=""/>
+        <p:cNvGrpSpPr/>
+        <p:nvPr/>
+      </p:nvGrpSpPr>
+      <p:grpSpPr/>
+      <p:sp>
+        <p:nvSpPr>
+          <p:cNvPr id="2" name="Title 1"/>
+          <p:cNvSpPr>
+            <a:spLocks noGrp="1"/>
+          </p:cNvSpPr>
+          <p:nvPr>
+            <p:ph type="title"/>
+          </p:nvPr>
+        </p:nvSpPr>
+        <p:spPr/>
+        <p:txBody>
+          <a:bodyPr/>
+          <a:p>
+            <a:pPr algn="ctr"/>
+            <a:r>
+              <a:rPr lang="en-US"/>
+              <a:t>Service Mesh</a:t>
+            </a:r>
+            <a:endParaRPr lang="en-US"/>
+          </a:p>
+        </p:txBody>
+      </p:sp>
+      <p:pic>
+        <p:nvPicPr>
+          <p:cNvPr id="5" name="Content Placeholder 4"/>
+          <p:cNvPicPr>
+            <a:picLocks noChangeAspect="1"/>
+          </p:cNvPicPr>
+          <p:nvPr>
+            <p:ph idx="1"/>
+          </p:nvPr>
+        </p:nvPicPr>
+        <p:blipFill>
+          <a:blip r:embed="rId1"/>
+          <a:stretch>
+            <a:fillRect/>
+          </a:stretch>
+        </p:blipFill>
+        <p:spPr>
+          <a:xfrm>
+            <a:off x="1471930" y="1825625"/>
+            <a:ext cx="9247505" cy="4351655"/>
+          </a:xfrm>
+          <a:prstGeom prst="rect">
+            <a:avLst/>
+          </a:prstGeom>
+        </p:spPr>
+      </p:pic>
+      <p:sp>
+        <p:nvSpPr>
+          <p:cNvPr id="4" name="Slide Number Placeholder 3"/>
+          <p:cNvSpPr>
+            <a:spLocks noGrp="1"/>
+          </p:cNvSpPr>
+          <p:nvPr>
+            <p:ph type="sldNum" sz="quarter" idx="12"/>
+          </p:nvPr>
+        </p:nvSpPr>
+        <p:spPr/>
+        <p:txBody>
+          <a:bodyPr/>
+          <a:p>
+            <a:fld id="{9B618960-8005-486C-9A75-10CB2AAC16F9}" type="slidenum">
+              <a:rPr lang="en-US" smtClean="0"/>
+            </a:fld>
+            <a:endParaRPr lang="en-US"/>
+          </a:p>
+        </p:txBody>
+      </p:sp>
+    </p:spTree>
+  </p:cSld>
+  <p:clrMapOvr>
+    <a:masterClrMapping/>
+  </p:clrMapOvr>
+</p:sld>
+</file>
+
+<file path=ppt/slides/slide19.xml><?xml version="1.0" encoding="utf-8"?>
+<p:sld xmlns:a="http://schemas.openxmlformats.org/drawingml/2006/main" xmlns:r="http://schemas.openxmlformats.org/officeDocument/2006/relationships" xmlns:p="http://schemas.openxmlformats.org/presentationml/2006/main">
+  <p:cSld>
+    <p:spTree>
+      <p:nvGrpSpPr>
+        <p:cNvPr id="1" name=""/>
+        <p:cNvGrpSpPr/>
+        <p:nvPr/>
+      </p:nvGrpSpPr>
+      <p:grpSpPr/>
+      <p:sp>
+        <p:nvSpPr>
+          <p:cNvPr id="2" name="Title 1"/>
+          <p:cNvSpPr>
+            <a:spLocks noGrp="1"/>
+          </p:cNvSpPr>
+          <p:nvPr>
+            <p:ph type="title"/>
+          </p:nvPr>
+        </p:nvSpPr>
+        <p:spPr/>
+        <p:txBody>
+          <a:bodyPr/>
+          <a:p>
+            <a:pPr algn="ctr"/>
+            <a:r>
+              <a:rPr lang="en-US" altLang="en-US"/>
+              <a:t>Strangler Pattern</a:t>
+            </a:r>
+            <a:endParaRPr lang="en-US" altLang="en-US"/>
+          </a:p>
+        </p:txBody>
+      </p:sp>
+      <p:sp>
+        <p:nvSpPr>
+          <p:cNvPr id="4" name="Slide Number Placeholder 3"/>
+          <p:cNvSpPr>
+            <a:spLocks noGrp="1"/>
+          </p:cNvSpPr>
+          <p:nvPr>
+            <p:ph type="sldNum" sz="quarter" idx="12"/>
+          </p:nvPr>
+        </p:nvSpPr>
+        <p:spPr/>
+        <p:txBody>
+          <a:bodyPr/>
+          <a:p>
+            <a:fld id="{9B618960-8005-486C-9A75-10CB2AAC16F9}" type="slidenum">
+              <a:rPr lang="en-US" smtClean="0"/>
+            </a:fld>
+            <a:endParaRPr lang="en-US"/>
+          </a:p>
+        </p:txBody>
+      </p:sp>
+      <p:pic>
+        <p:nvPicPr>
+          <p:cNvPr id="6" name="Content Placeholder 5"/>
+          <p:cNvPicPr>
+            <a:picLocks noChangeAspect="1"/>
+          </p:cNvPicPr>
+          <p:nvPr>
+            <p:ph idx="1"/>
+          </p:nvPr>
+        </p:nvPicPr>
+        <p:blipFill>
+          <a:blip r:embed="rId1"/>
+          <a:stretch>
+            <a:fillRect/>
+          </a:stretch>
+        </p:blipFill>
+        <p:spPr>
+          <a:xfrm>
+            <a:off x="1752600" y="1825625"/>
+            <a:ext cx="8685530" cy="4351655"/>
+          </a:xfrm>
+          <a:prstGeom prst="rect">
+            <a:avLst/>
+          </a:prstGeom>
+        </p:spPr>
+      </p:pic>
+    </p:spTree>
+  </p:cSld>
+  <p:clrMapOvr>
+    <a:masterClrMapping/>
+  </p:clrMapOvr>
+</p:sld>
+</file>
+
 <file path=ppt/slides/slide2.xml><?xml version="1.0" encoding="utf-8"?>
 <p:sld xmlns:a="http://schemas.openxmlformats.org/drawingml/2006/main" xmlns:r="http://schemas.openxmlformats.org/officeDocument/2006/relationships" xmlns:p="http://schemas.openxmlformats.org/presentationml/2006/main">
   <p:cSld>
@@ -3994,6 +4588,789 @@
               <a:t>Microservices Architecture vs Monolithic Architecture</a:t>
             </a:r>
             <a:endParaRPr lang="en-US" dirty="0"/>
+          </a:p>
+        </p:txBody>
+      </p:sp>
+    </p:spTree>
+  </p:cSld>
+  <p:clrMapOvr>
+    <a:masterClrMapping/>
+  </p:clrMapOvr>
+</p:sld>
+</file>
+
+<file path=ppt/slides/slide20.xml><?xml version="1.0" encoding="utf-8"?>
+<p:sld xmlns:a="http://schemas.openxmlformats.org/drawingml/2006/main" xmlns:r="http://schemas.openxmlformats.org/officeDocument/2006/relationships" xmlns:p="http://schemas.openxmlformats.org/presentationml/2006/main">
+  <p:cSld>
+    <p:spTree>
+      <p:nvGrpSpPr>
+        <p:cNvPr id="1" name=""/>
+        <p:cNvGrpSpPr/>
+        <p:nvPr/>
+      </p:nvGrpSpPr>
+      <p:grpSpPr/>
+      <p:sp>
+        <p:nvSpPr>
+          <p:cNvPr id="2" name="Title 1"/>
+          <p:cNvSpPr>
+            <a:spLocks noGrp="1"/>
+          </p:cNvSpPr>
+          <p:nvPr>
+            <p:ph type="title"/>
+          </p:nvPr>
+        </p:nvSpPr>
+        <p:spPr/>
+        <p:txBody>
+          <a:bodyPr/>
+          <a:p>
+            <a:pPr algn="ctr"/>
+            <a:r>
+              <a:rPr lang="en-US" altLang="en-US">
+                <a:sym typeface="+mn-ea"/>
+              </a:rPr>
+              <a:t>Strangler Pattern</a:t>
+            </a:r>
+            <a:endParaRPr lang="en-US"/>
+          </a:p>
+        </p:txBody>
+      </p:sp>
+      <p:sp>
+        <p:nvSpPr>
+          <p:cNvPr id="4" name="Slide Number Placeholder 3"/>
+          <p:cNvSpPr>
+            <a:spLocks noGrp="1"/>
+          </p:cNvSpPr>
+          <p:nvPr>
+            <p:ph type="sldNum" sz="quarter" idx="12"/>
+          </p:nvPr>
+        </p:nvSpPr>
+        <p:spPr/>
+        <p:txBody>
+          <a:bodyPr/>
+          <a:p>
+            <a:fld id="{9B618960-8005-486C-9A75-10CB2AAC16F9}" type="slidenum">
+              <a:rPr lang="en-US" smtClean="0"/>
+            </a:fld>
+            <a:endParaRPr lang="en-US"/>
+          </a:p>
+        </p:txBody>
+      </p:sp>
+      <p:pic>
+        <p:nvPicPr>
+          <p:cNvPr id="6" name="Content Placeholder 5"/>
+          <p:cNvPicPr>
+            <a:picLocks noChangeAspect="1"/>
+          </p:cNvPicPr>
+          <p:nvPr>
+            <p:ph idx="1"/>
+          </p:nvPr>
+        </p:nvPicPr>
+        <p:blipFill>
+          <a:blip r:embed="rId1"/>
+          <a:stretch>
+            <a:fillRect/>
+          </a:stretch>
+        </p:blipFill>
+        <p:spPr>
+          <a:xfrm>
+            <a:off x="1744345" y="1825625"/>
+            <a:ext cx="8702675" cy="4351655"/>
+          </a:xfrm>
+          <a:prstGeom prst="rect">
+            <a:avLst/>
+          </a:prstGeom>
+        </p:spPr>
+      </p:pic>
+    </p:spTree>
+  </p:cSld>
+  <p:clrMapOvr>
+    <a:masterClrMapping/>
+  </p:clrMapOvr>
+</p:sld>
+</file>
+
+<file path=ppt/slides/slide21.xml><?xml version="1.0" encoding="utf-8"?>
+<p:sld xmlns:a="http://schemas.openxmlformats.org/drawingml/2006/main" xmlns:r="http://schemas.openxmlformats.org/officeDocument/2006/relationships" xmlns:p="http://schemas.openxmlformats.org/presentationml/2006/main">
+  <p:cSld>
+    <p:spTree>
+      <p:nvGrpSpPr>
+        <p:cNvPr id="1" name=""/>
+        <p:cNvGrpSpPr/>
+        <p:nvPr/>
+      </p:nvGrpSpPr>
+      <p:grpSpPr/>
+      <p:sp>
+        <p:nvSpPr>
+          <p:cNvPr id="2" name="Title 1"/>
+          <p:cNvSpPr>
+            <a:spLocks noGrp="1"/>
+          </p:cNvSpPr>
+          <p:nvPr>
+            <p:ph type="title"/>
+          </p:nvPr>
+        </p:nvSpPr>
+        <p:spPr/>
+        <p:txBody>
+          <a:bodyPr/>
+          <a:p>
+            <a:pPr algn="ctr"/>
+            <a:r>
+              <a:rPr lang="en-US" altLang="en-US"/>
+              <a:t>Backend for frontend (BFF)</a:t>
+            </a:r>
+            <a:endParaRPr lang="en-US" altLang="en-US"/>
+          </a:p>
+        </p:txBody>
+      </p:sp>
+      <p:pic>
+        <p:nvPicPr>
+          <p:cNvPr id="5" name="Content Placeholder 4"/>
+          <p:cNvPicPr>
+            <a:picLocks noChangeAspect="1"/>
+          </p:cNvPicPr>
+          <p:nvPr>
+            <p:ph idx="1"/>
+          </p:nvPr>
+        </p:nvPicPr>
+        <p:blipFill>
+          <a:blip r:embed="rId1"/>
+          <a:stretch>
+            <a:fillRect/>
+          </a:stretch>
+        </p:blipFill>
+        <p:spPr>
+          <a:xfrm>
+            <a:off x="3242310" y="1825625"/>
+            <a:ext cx="5706110" cy="4351655"/>
+          </a:xfrm>
+          <a:prstGeom prst="rect">
+            <a:avLst/>
+          </a:prstGeom>
+        </p:spPr>
+      </p:pic>
+      <p:sp>
+        <p:nvSpPr>
+          <p:cNvPr id="4" name="Slide Number Placeholder 3"/>
+          <p:cNvSpPr>
+            <a:spLocks noGrp="1"/>
+          </p:cNvSpPr>
+          <p:nvPr>
+            <p:ph type="sldNum" sz="quarter" idx="12"/>
+          </p:nvPr>
+        </p:nvSpPr>
+        <p:spPr/>
+        <p:txBody>
+          <a:bodyPr/>
+          <a:p>
+            <a:fld id="{9B618960-8005-486C-9A75-10CB2AAC16F9}" type="slidenum">
+              <a:rPr lang="en-US" smtClean="0"/>
+            </a:fld>
+            <a:endParaRPr lang="en-US"/>
+          </a:p>
+        </p:txBody>
+      </p:sp>
+    </p:spTree>
+  </p:cSld>
+  <p:clrMapOvr>
+    <a:masterClrMapping/>
+  </p:clrMapOvr>
+</p:sld>
+</file>
+
+<file path=ppt/slides/slide22.xml><?xml version="1.0" encoding="utf-8"?>
+<p:sld xmlns:a="http://schemas.openxmlformats.org/drawingml/2006/main" xmlns:r="http://schemas.openxmlformats.org/officeDocument/2006/relationships" xmlns:p="http://schemas.openxmlformats.org/presentationml/2006/main">
+  <p:cSld>
+    <p:spTree>
+      <p:nvGrpSpPr>
+        <p:cNvPr id="1" name=""/>
+        <p:cNvGrpSpPr/>
+        <p:nvPr/>
+      </p:nvGrpSpPr>
+      <p:grpSpPr/>
+      <p:sp>
+        <p:nvSpPr>
+          <p:cNvPr id="2" name="Title 1"/>
+          <p:cNvSpPr>
+            <a:spLocks noGrp="1"/>
+          </p:cNvSpPr>
+          <p:nvPr>
+            <p:ph type="title"/>
+          </p:nvPr>
+        </p:nvSpPr>
+        <p:spPr/>
+        <p:txBody>
+          <a:bodyPr/>
+          <a:p>
+            <a:pPr algn="ctr"/>
+            <a:r>
+              <a:rPr lang="en-US" altLang="en-US"/>
+              <a:t>Backend for frontend (BFF)</a:t>
+            </a:r>
+            <a:endParaRPr lang="en-US" altLang="en-US"/>
+          </a:p>
+        </p:txBody>
+      </p:sp>
+      <p:sp>
+        <p:nvSpPr>
+          <p:cNvPr id="4" name="Slide Number Placeholder 3"/>
+          <p:cNvSpPr>
+            <a:spLocks noGrp="1"/>
+          </p:cNvSpPr>
+          <p:nvPr>
+            <p:ph type="sldNum" sz="quarter" idx="12"/>
+          </p:nvPr>
+        </p:nvSpPr>
+        <p:spPr/>
+        <p:txBody>
+          <a:bodyPr/>
+          <a:p>
+            <a:fld id="{9B618960-8005-486C-9A75-10CB2AAC16F9}" type="slidenum">
+              <a:rPr lang="en-US" smtClean="0"/>
+            </a:fld>
+            <a:endParaRPr lang="en-US"/>
+          </a:p>
+        </p:txBody>
+      </p:sp>
+      <p:pic>
+        <p:nvPicPr>
+          <p:cNvPr id="6" name="Content Placeholder 5"/>
+          <p:cNvPicPr>
+            <a:picLocks noChangeAspect="1"/>
+          </p:cNvPicPr>
+          <p:nvPr>
+            <p:ph idx="1"/>
+          </p:nvPr>
+        </p:nvPicPr>
+        <p:blipFill>
+          <a:blip r:embed="rId1"/>
+          <a:stretch>
+            <a:fillRect/>
+          </a:stretch>
+        </p:blipFill>
+        <p:spPr>
+          <a:xfrm>
+            <a:off x="3128010" y="1825625"/>
+            <a:ext cx="5934710" cy="4351655"/>
+          </a:xfrm>
+          <a:prstGeom prst="rect">
+            <a:avLst/>
+          </a:prstGeom>
+        </p:spPr>
+      </p:pic>
+    </p:spTree>
+  </p:cSld>
+  <p:clrMapOvr>
+    <a:masterClrMapping/>
+  </p:clrMapOvr>
+</p:sld>
+</file>
+
+<file path=ppt/slides/slide23.xml><?xml version="1.0" encoding="utf-8"?>
+<p:sld xmlns:a="http://schemas.openxmlformats.org/drawingml/2006/main" xmlns:r="http://schemas.openxmlformats.org/officeDocument/2006/relationships" xmlns:p="http://schemas.openxmlformats.org/presentationml/2006/main">
+  <p:cSld>
+    <p:spTree>
+      <p:nvGrpSpPr>
+        <p:cNvPr id="1" name=""/>
+        <p:cNvGrpSpPr/>
+        <p:nvPr/>
+      </p:nvGrpSpPr>
+      <p:grpSpPr/>
+      <p:sp>
+        <p:nvSpPr>
+          <p:cNvPr id="2" name="Title 1"/>
+          <p:cNvSpPr>
+            <a:spLocks noGrp="1"/>
+          </p:cNvSpPr>
+          <p:nvPr>
+            <p:ph type="title"/>
+          </p:nvPr>
+        </p:nvSpPr>
+        <p:spPr/>
+        <p:txBody>
+          <a:bodyPr/>
+          <a:p>
+            <a:pPr algn="ctr"/>
+            <a:r>
+              <a:rPr lang="en-US" altLang="en-US"/>
+              <a:t>Backend for frontend (BFF)</a:t>
+            </a:r>
+            <a:endParaRPr lang="en-US" altLang="en-US"/>
+          </a:p>
+        </p:txBody>
+      </p:sp>
+      <p:sp>
+        <p:nvSpPr>
+          <p:cNvPr id="4" name="Slide Number Placeholder 3"/>
+          <p:cNvSpPr>
+            <a:spLocks noGrp="1"/>
+          </p:cNvSpPr>
+          <p:nvPr>
+            <p:ph type="sldNum" sz="quarter" idx="12"/>
+          </p:nvPr>
+        </p:nvSpPr>
+        <p:spPr/>
+        <p:txBody>
+          <a:bodyPr/>
+          <a:p>
+            <a:fld id="{9B618960-8005-486C-9A75-10CB2AAC16F9}" type="slidenum">
+              <a:rPr lang="en-US" smtClean="0"/>
+            </a:fld>
+            <a:endParaRPr lang="en-US"/>
+          </a:p>
+        </p:txBody>
+      </p:sp>
+      <p:pic>
+        <p:nvPicPr>
+          <p:cNvPr id="5" name="Content Placeholder 4"/>
+          <p:cNvPicPr>
+            <a:picLocks noChangeAspect="1"/>
+          </p:cNvPicPr>
+          <p:nvPr>
+            <p:ph idx="1"/>
+          </p:nvPr>
+        </p:nvPicPr>
+        <p:blipFill>
+          <a:blip r:embed="rId1"/>
+          <a:stretch>
+            <a:fillRect/>
+          </a:stretch>
+        </p:blipFill>
+        <p:spPr>
+          <a:xfrm>
+            <a:off x="1678940" y="1825625"/>
+            <a:ext cx="8832850" cy="4351655"/>
+          </a:xfrm>
+          <a:prstGeom prst="rect">
+            <a:avLst/>
+          </a:prstGeom>
+        </p:spPr>
+      </p:pic>
+    </p:spTree>
+  </p:cSld>
+  <p:clrMapOvr>
+    <a:masterClrMapping/>
+  </p:clrMapOvr>
+</p:sld>
+</file>
+
+<file path=ppt/slides/slide24.xml><?xml version="1.0" encoding="utf-8"?>
+<p:sld xmlns:a="http://schemas.openxmlformats.org/drawingml/2006/main" xmlns:r="http://schemas.openxmlformats.org/officeDocument/2006/relationships" xmlns:p="http://schemas.openxmlformats.org/presentationml/2006/main">
+  <p:cSld>
+    <p:spTree>
+      <p:nvGrpSpPr>
+        <p:cNvPr id="1" name=""/>
+        <p:cNvGrpSpPr/>
+        <p:nvPr/>
+      </p:nvGrpSpPr>
+      <p:grpSpPr/>
+      <p:sp>
+        <p:nvSpPr>
+          <p:cNvPr id="2" name="Title 1"/>
+          <p:cNvSpPr>
+            <a:spLocks noGrp="1"/>
+          </p:cNvSpPr>
+          <p:nvPr>
+            <p:ph type="title"/>
+          </p:nvPr>
+        </p:nvSpPr>
+        <p:spPr/>
+        <p:txBody>
+          <a:bodyPr/>
+          <a:p>
+            <a:endParaRPr lang="en-US"/>
+          </a:p>
+        </p:txBody>
+      </p:sp>
+      <p:pic>
+        <p:nvPicPr>
+          <p:cNvPr id="5" name="Content Placeholder 4"/>
+          <p:cNvPicPr>
+            <a:picLocks noChangeAspect="1"/>
+          </p:cNvPicPr>
+          <p:nvPr>
+            <p:ph idx="1"/>
+          </p:nvPr>
+        </p:nvPicPr>
+        <p:blipFill>
+          <a:blip r:embed="rId1"/>
+          <a:stretch>
+            <a:fillRect/>
+          </a:stretch>
+        </p:blipFill>
+        <p:spPr>
+          <a:xfrm>
+            <a:off x="1455420" y="1346200"/>
+            <a:ext cx="10050780" cy="4724400"/>
+          </a:xfrm>
+          <a:prstGeom prst="rect">
+            <a:avLst/>
+          </a:prstGeom>
+        </p:spPr>
+      </p:pic>
+      <p:sp>
+        <p:nvSpPr>
+          <p:cNvPr id="4" name="Slide Number Placeholder 3"/>
+          <p:cNvSpPr>
+            <a:spLocks noGrp="1"/>
+          </p:cNvSpPr>
+          <p:nvPr>
+            <p:ph type="sldNum" sz="quarter" idx="12"/>
+          </p:nvPr>
+        </p:nvSpPr>
+        <p:spPr/>
+        <p:txBody>
+          <a:bodyPr/>
+          <a:p>
+            <a:fld id="{9B618960-8005-486C-9A75-10CB2AAC16F9}" type="slidenum">
+              <a:rPr lang="en-US" smtClean="0"/>
+            </a:fld>
+            <a:endParaRPr lang="en-US"/>
+          </a:p>
+        </p:txBody>
+      </p:sp>
+    </p:spTree>
+  </p:cSld>
+  <p:clrMapOvr>
+    <a:masterClrMapping/>
+  </p:clrMapOvr>
+</p:sld>
+</file>
+
+<file path=ppt/slides/slide25.xml><?xml version="1.0" encoding="utf-8"?>
+<p:sld xmlns:a="http://schemas.openxmlformats.org/drawingml/2006/main" xmlns:r="http://schemas.openxmlformats.org/officeDocument/2006/relationships" xmlns:p="http://schemas.openxmlformats.org/presentationml/2006/main">
+  <p:cSld>
+    <p:spTree>
+      <p:nvGrpSpPr>
+        <p:cNvPr id="1" name=""/>
+        <p:cNvGrpSpPr/>
+        <p:nvPr/>
+      </p:nvGrpSpPr>
+      <p:grpSpPr/>
+      <p:sp>
+        <p:nvSpPr>
+          <p:cNvPr id="2" name="Title 1"/>
+          <p:cNvSpPr>
+            <a:spLocks noGrp="1"/>
+          </p:cNvSpPr>
+          <p:nvPr>
+            <p:ph type="title"/>
+          </p:nvPr>
+        </p:nvSpPr>
+        <p:spPr/>
+        <p:txBody>
+          <a:bodyPr/>
+          <a:p>
+            <a:endParaRPr lang="en-US"/>
+          </a:p>
+        </p:txBody>
+      </p:sp>
+      <p:pic>
+        <p:nvPicPr>
+          <p:cNvPr id="5" name="Content Placeholder 4"/>
+          <p:cNvPicPr>
+            <a:picLocks noChangeAspect="1"/>
+          </p:cNvPicPr>
+          <p:nvPr>
+            <p:ph idx="1"/>
+          </p:nvPr>
+        </p:nvPicPr>
+        <p:blipFill>
+          <a:blip r:embed="rId1"/>
+          <a:stretch>
+            <a:fillRect/>
+          </a:stretch>
+        </p:blipFill>
+        <p:spPr>
+          <a:xfrm>
+            <a:off x="2117090" y="365125"/>
+            <a:ext cx="8245475" cy="5895975"/>
+          </a:xfrm>
+          <a:prstGeom prst="rect">
+            <a:avLst/>
+          </a:prstGeom>
+        </p:spPr>
+      </p:pic>
+      <p:sp>
+        <p:nvSpPr>
+          <p:cNvPr id="4" name="Slide Number Placeholder 3"/>
+          <p:cNvSpPr>
+            <a:spLocks noGrp="1"/>
+          </p:cNvSpPr>
+          <p:nvPr>
+            <p:ph type="sldNum" sz="quarter" idx="12"/>
+          </p:nvPr>
+        </p:nvSpPr>
+        <p:spPr/>
+        <p:txBody>
+          <a:bodyPr/>
+          <a:p>
+            <a:fld id="{9B618960-8005-486C-9A75-10CB2AAC16F9}" type="slidenum">
+              <a:rPr lang="en-US" smtClean="0"/>
+            </a:fld>
+            <a:endParaRPr lang="en-US"/>
+          </a:p>
+        </p:txBody>
+      </p:sp>
+    </p:spTree>
+  </p:cSld>
+  <p:clrMapOvr>
+    <a:masterClrMapping/>
+  </p:clrMapOvr>
+</p:sld>
+</file>
+
+<file path=ppt/slides/slide26.xml><?xml version="1.0" encoding="utf-8"?>
+<p:sld xmlns:a="http://schemas.openxmlformats.org/drawingml/2006/main" xmlns:r="http://schemas.openxmlformats.org/officeDocument/2006/relationships" xmlns:p="http://schemas.openxmlformats.org/presentationml/2006/main">
+  <p:cSld>
+    <p:spTree>
+      <p:nvGrpSpPr>
+        <p:cNvPr id="1" name=""/>
+        <p:cNvGrpSpPr/>
+        <p:nvPr/>
+      </p:nvGrpSpPr>
+      <p:grpSpPr/>
+      <p:sp>
+        <p:nvSpPr>
+          <p:cNvPr id="2" name="Title 1"/>
+          <p:cNvSpPr>
+            <a:spLocks noGrp="1"/>
+          </p:cNvSpPr>
+          <p:nvPr>
+            <p:ph type="title"/>
+          </p:nvPr>
+        </p:nvSpPr>
+        <p:spPr/>
+        <p:txBody>
+          <a:bodyPr/>
+          <a:p>
+            <a:endParaRPr lang="en-US"/>
+          </a:p>
+        </p:txBody>
+      </p:sp>
+      <p:pic>
+        <p:nvPicPr>
+          <p:cNvPr id="5" name="Content Placeholder 4"/>
+          <p:cNvPicPr>
+            <a:picLocks noChangeAspect="1"/>
+          </p:cNvPicPr>
+          <p:nvPr>
+            <p:ph idx="1"/>
+          </p:nvPr>
+        </p:nvPicPr>
+        <p:blipFill>
+          <a:blip r:embed="rId1"/>
+          <a:stretch>
+            <a:fillRect/>
+          </a:stretch>
+        </p:blipFill>
+        <p:spPr>
+          <a:xfrm>
+            <a:off x="554990" y="461010"/>
+            <a:ext cx="11082020" cy="5541010"/>
+          </a:xfrm>
+          <a:prstGeom prst="rect">
+            <a:avLst/>
+          </a:prstGeom>
+        </p:spPr>
+      </p:pic>
+      <p:sp>
+        <p:nvSpPr>
+          <p:cNvPr id="4" name="Slide Number Placeholder 3"/>
+          <p:cNvSpPr>
+            <a:spLocks noGrp="1"/>
+          </p:cNvSpPr>
+          <p:nvPr>
+            <p:ph type="sldNum" sz="quarter" idx="12"/>
+          </p:nvPr>
+        </p:nvSpPr>
+        <p:spPr/>
+        <p:txBody>
+          <a:bodyPr/>
+          <a:p>
+            <a:fld id="{9B618960-8005-486C-9A75-10CB2AAC16F9}" type="slidenum">
+              <a:rPr lang="en-US" smtClean="0"/>
+            </a:fld>
+            <a:endParaRPr lang="en-US"/>
+          </a:p>
+        </p:txBody>
+      </p:sp>
+    </p:spTree>
+  </p:cSld>
+  <p:clrMapOvr>
+    <a:masterClrMapping/>
+  </p:clrMapOvr>
+</p:sld>
+</file>
+
+<file path=ppt/slides/slide27.xml><?xml version="1.0" encoding="utf-8"?>
+<p:sld xmlns:a="http://schemas.openxmlformats.org/drawingml/2006/main" xmlns:r="http://schemas.openxmlformats.org/officeDocument/2006/relationships" xmlns:p="http://schemas.openxmlformats.org/presentationml/2006/main">
+  <p:cSld>
+    <p:spTree>
+      <p:nvGrpSpPr>
+        <p:cNvPr id="1" name=""/>
+        <p:cNvGrpSpPr/>
+        <p:nvPr/>
+      </p:nvGrpSpPr>
+      <p:grpSpPr/>
+      <p:sp>
+        <p:nvSpPr>
+          <p:cNvPr id="2" name="Title 1"/>
+          <p:cNvSpPr>
+            <a:spLocks noGrp="1"/>
+          </p:cNvSpPr>
+          <p:nvPr>
+            <p:ph type="title"/>
+          </p:nvPr>
+        </p:nvSpPr>
+        <p:spPr/>
+        <p:txBody>
+          <a:bodyPr/>
+          <a:p>
+            <a:endParaRPr lang="en-US"/>
+          </a:p>
+        </p:txBody>
+      </p:sp>
+      <p:sp>
+        <p:nvSpPr>
+          <p:cNvPr id="3" name="Content Placeholder 2"/>
+          <p:cNvSpPr>
+            <a:spLocks noGrp="1"/>
+          </p:cNvSpPr>
+          <p:nvPr>
+            <p:ph idx="1"/>
+          </p:nvPr>
+        </p:nvSpPr>
+        <p:spPr/>
+        <p:txBody>
+          <a:bodyPr/>
+          <a:p>
+            <a:endParaRPr lang="en-US"/>
+          </a:p>
+        </p:txBody>
+      </p:sp>
+      <p:sp>
+        <p:nvSpPr>
+          <p:cNvPr id="4" name="Slide Number Placeholder 3"/>
+          <p:cNvSpPr>
+            <a:spLocks noGrp="1"/>
+          </p:cNvSpPr>
+          <p:nvPr>
+            <p:ph type="sldNum" sz="quarter" idx="12"/>
+          </p:nvPr>
+        </p:nvSpPr>
+        <p:spPr/>
+        <p:txBody>
+          <a:bodyPr/>
+          <a:p>
+            <a:fld id="{9B618960-8005-486C-9A75-10CB2AAC16F9}" type="slidenum">
+              <a:rPr lang="en-US" smtClean="0"/>
+            </a:fld>
+            <a:endParaRPr lang="en-US"/>
+          </a:p>
+        </p:txBody>
+      </p:sp>
+      <p:pic>
+        <p:nvPicPr>
+          <p:cNvPr id="5" name="Picture 4"/>
+          <p:cNvPicPr/>
+          <p:nvPr/>
+        </p:nvPicPr>
+        <p:blipFill>
+          <a:blip r:embed="rId1"/>
+          <a:stretch>
+            <a:fillRect/>
+          </a:stretch>
+        </p:blipFill>
+        <p:spPr>
+          <a:xfrm>
+            <a:off x="1014095" y="636905"/>
+            <a:ext cx="10163175" cy="5540375"/>
+          </a:xfrm>
+          <a:prstGeom prst="rect">
+            <a:avLst/>
+          </a:prstGeom>
+        </p:spPr>
+      </p:pic>
+    </p:spTree>
+  </p:cSld>
+  <p:clrMapOvr>
+    <a:masterClrMapping/>
+  </p:clrMapOvr>
+</p:sld>
+</file>
+
+<file path=ppt/slides/slide28.xml><?xml version="1.0" encoding="utf-8"?>
+<p:sld xmlns:a="http://schemas.openxmlformats.org/drawingml/2006/main" xmlns:r="http://schemas.openxmlformats.org/officeDocument/2006/relationships" xmlns:p="http://schemas.openxmlformats.org/presentationml/2006/main">
+  <p:cSld>
+    <p:spTree>
+      <p:nvGrpSpPr>
+        <p:cNvPr id="1" name=""/>
+        <p:cNvGrpSpPr/>
+        <p:nvPr/>
+      </p:nvGrpSpPr>
+      <p:grpSpPr/>
+      <p:sp>
+        <p:nvSpPr>
+          <p:cNvPr id="2" name="Title 1"/>
+          <p:cNvSpPr>
+            <a:spLocks noGrp="1"/>
+          </p:cNvSpPr>
+          <p:nvPr>
+            <p:ph type="title"/>
+          </p:nvPr>
+        </p:nvSpPr>
+        <p:spPr/>
+        <p:txBody>
+          <a:bodyPr/>
+          <a:p>
+            <a:endParaRPr lang="en-US"/>
+          </a:p>
+        </p:txBody>
+      </p:sp>
+      <p:pic>
+        <p:nvPicPr>
+          <p:cNvPr id="5" name="Content Placeholder 4"/>
+          <p:cNvPicPr>
+            <a:picLocks noChangeAspect="1"/>
+          </p:cNvPicPr>
+          <p:nvPr>
+            <p:ph idx="1"/>
+          </p:nvPr>
+        </p:nvPicPr>
+        <p:blipFill>
+          <a:blip r:embed="rId1"/>
+          <a:stretch>
+            <a:fillRect/>
+          </a:stretch>
+        </p:blipFill>
+        <p:spPr>
+          <a:xfrm>
+            <a:off x="1796415" y="175260"/>
+            <a:ext cx="8854440" cy="6331585"/>
+          </a:xfrm>
+          <a:prstGeom prst="rect">
+            <a:avLst/>
+          </a:prstGeom>
+        </p:spPr>
+      </p:pic>
+      <p:sp>
+        <p:nvSpPr>
+          <p:cNvPr id="4" name="Slide Number Placeholder 3"/>
+          <p:cNvSpPr>
+            <a:spLocks noGrp="1"/>
+          </p:cNvSpPr>
+          <p:nvPr>
+            <p:ph type="sldNum" sz="quarter" idx="12"/>
+          </p:nvPr>
+        </p:nvSpPr>
+        <p:spPr/>
+        <p:txBody>
+          <a:bodyPr/>
+          <a:p>
+            <a:fld id="{9B618960-8005-486C-9A75-10CB2AAC16F9}" type="slidenum">
+              <a:rPr lang="en-US" smtClean="0"/>
+            </a:fld>
+            <a:endParaRPr lang="en-US"/>
           </a:p>
         </p:txBody>
       </p:sp>
